--- a/docs/deck/aftercall-koffee-after-kitkat.pptx
+++ b/docs/deck/aftercall-koffee-after-kitkat.pptx
@@ -7294,681 +7294,6 @@
   <p:cSld>
     <p:spTree>
       <p:nvGrpSpPr>
-        <p:cNvPr id="123" name="Shape 123"/>
-        <p:cNvGrpSpPr/>
-        <p:nvPr/>
-      </p:nvGrpSpPr>
-      <p:grpSpPr>
-        <a:xfrm>
-          <a:off x="0" y="0"/>
-          <a:ext cx="0" cy="0"/>
-          <a:chOff x="0" y="0"/>
-          <a:chExt cx="0" cy="0"/>
-        </a:xfrm>
-      </p:grpSpPr>
-      <p:pic>
-        <p:nvPicPr>
-          <p:cNvPr id="124" name="Google Shape;124;p22" title="Frame 144.png"/>
-          <p:cNvPicPr preferRelativeResize="0"/>
-          <p:nvPr/>
-        </p:nvPicPr>
-        <p:blipFill rotWithShape="1">
-          <a:blip r:embed="rId3">
-            <a:alphaModFix/>
-          </a:blip>
-          <a:srcRect b="98001" l="0" r="0" t="0"/>
-          <a:stretch/>
-        </p:blipFill>
-        <p:spPr>
-          <a:xfrm>
-            <a:off x="0" y="5093562"/>
-            <a:ext cx="9144000" cy="54275"/>
-          </a:xfrm>
-          <a:prstGeom prst="rect">
-            <a:avLst/>
-          </a:prstGeom>
-          <a:noFill/>
-          <a:ln>
-            <a:noFill/>
-          </a:ln>
-        </p:spPr>
-      </p:pic>
-      <p:pic>
-        <p:nvPicPr>
-          <p:cNvPr id="125" name="Google Shape;125;p22" title="Group 427319979.png"/>
-          <p:cNvPicPr preferRelativeResize="0"/>
-          <p:nvPr/>
-        </p:nvPicPr>
-        <p:blipFill>
-          <a:blip r:embed="rId4">
-            <a:alphaModFix/>
-          </a:blip>
-          <a:stretch>
-            <a:fillRect/>
-          </a:stretch>
-        </p:blipFill>
-        <p:spPr>
-          <a:xfrm>
-            <a:off x="0" y="1"/>
-            <a:ext cx="9144000" cy="507359"/>
-          </a:xfrm>
-          <a:prstGeom prst="rect">
-            <a:avLst/>
-          </a:prstGeom>
-          <a:noFill/>
-          <a:ln>
-            <a:noFill/>
-          </a:ln>
-        </p:spPr>
-      </p:pic>
-      <p:sp>
-        <p:nvSpPr>
-          <p:cNvPr id="126" name="Google Shape;126;p22"/>
-          <p:cNvSpPr/>
-          <p:nvPr/>
-        </p:nvSpPr>
-        <p:spPr>
-          <a:xfrm>
-            <a:off x="-29250" y="5071875"/>
-            <a:ext cx="9173400" cy="97800"/>
-          </a:xfrm>
-          <a:prstGeom prst="rect">
-            <a:avLst/>
-          </a:prstGeom>
-          <a:solidFill>
-            <a:schemeClr val="dk1"/>
-          </a:solidFill>
-          <a:ln>
-            <a:noFill/>
-          </a:ln>
-        </p:spPr>
-        <p:txBody>
-          <a:bodyPr anchorCtr="0" anchor="ctr" bIns="91425" lIns="91425" spcFirstLastPara="1" rIns="91425" wrap="square" tIns="91425">
-            <a:noAutofit/>
-          </a:bodyPr>
-          <a:lstStyle/>
-          <a:p>
-            <a:pPr indent="0" lvl="0" marL="0" rtl="0" algn="ctr">
-              <a:spcBef>
-                <a:spcPts val="0"/>
-              </a:spcBef>
-              <a:spcAft>
-                <a:spcPts val="0"/>
-              </a:spcAft>
-              <a:buNone/>
-            </a:pPr>
-            <a:r>
-              <a:t/>
-            </a:r>
-            <a:endParaRPr/>
-          </a:p>
-        </p:txBody>
-      </p:sp>
-      <p:sp>
-        <p:nvSpPr>
-          <p:cNvPr id="127" name="Google Shape;127;p22"/>
-          <p:cNvSpPr txBox="1"/>
-          <p:nvPr/>
-        </p:nvSpPr>
-        <p:spPr>
-          <a:xfrm>
-            <a:off x="265350" y="663825"/>
-            <a:ext cx="8943000" cy="557784"/>
-          </a:xfrm>
-          <a:prstGeom prst="rect">
-            <a:avLst/>
-          </a:prstGeom>
-          <a:noFill/>
-          <a:ln>
-            <a:noFill/>
-          </a:ln>
-        </p:spPr>
-        <p:txBody>
-          <a:bodyPr anchorCtr="0" anchor="t" bIns="91425" lIns="91425" spcFirstLastPara="1" rIns="91425" wrap="square" tIns="91425">
-            <a:noAutofit/>
-          </a:bodyPr>
-          <a:lstStyle/>
-          <a:p>
-            <a:pPr indent="0" lvl="0" marL="0" rtl="0" algn="l">
-              <a:spcBef>
-                <a:spcPts val="0"/>
-              </a:spcBef>
-              <a:spcAft>
-                <a:spcPts val="0"/>
-              </a:spcAft>
-              <a:buNone/>
-            </a:pPr>
-            <a:r>
-              <a:rPr lang="en-GB" sz="1600">
-                <a:latin typeface="Google Sans Flex Medium"/>
-                <a:ea typeface="Google Sans Flex Medium"/>
-                <a:cs typeface="Google Sans Flex Medium"/>
-                <a:sym typeface="Google Sans Flex Medium"/>
-              </a:rPr>
-              <a:t>Estimated implementation cost</a:t>
-            </a:r>
-            <a:endParaRPr sz="1600">
-              <a:latin typeface="Google Sans Flex Medium"/>
-              <a:ea typeface="Google Sans Flex Medium"/>
-              <a:cs typeface="Google Sans Flex Medium"/>
-              <a:sym typeface="Google Sans Flex Medium"/>
-            </a:endParaRPr>
-          </a:p>
-        </p:txBody>
-      </p:sp>
-      <p:graphicFrame>
-        <p:nvGraphicFramePr>
-          <p:cNvPr id="128" name="Chart 127"/>
-          <p:cNvGraphicFramePr>
-            <a:graphicFrameLocks noGrp="1"/>
-          </p:cNvGraphicFramePr>
-          <p:nvPr/>
-        </p:nvGraphicFramePr>
-        <p:xfrm>
-          <a:off x="274320" y="1600200"/>
-          <a:ext cx="4846320" cy="2788920"/>
-        </p:xfrm>
-        <a:graphic>
-          <a:graphicData uri="http://schemas.openxmlformats.org/drawingml/2006/chart">
-            <c:chart r:id="rId5"/>
-          </a:graphicData>
-        </a:graphic>
-      </p:graphicFrame>
-      <p:sp>
-        <p:nvSpPr>
-          <p:cNvPr id="129" name="TextBox 128"/>
-          <p:cNvSpPr txBox="1"/>
-          <p:nvPr/>
-        </p:nvSpPr>
-        <p:spPr>
-          <a:xfrm>
-            <a:off x="274320" y="1280160"/>
-            <a:ext cx="4846320" cy="310896"/>
-          </a:xfrm>
-          <a:prstGeom prst="rect">
-            <a:avLst/>
-          </a:prstGeom>
-          <a:noFill/>
-        </p:spPr>
-        <p:txBody>
-          <a:bodyPr wrap="square" lIns="36576" rIns="36576" tIns="27432" bIns="27432" anchor="t">
-            <a:spAutoFit/>
-          </a:bodyPr>
-          <a:lstStyle/>
-          <a:p>
-            <a:pPr algn="l">
-              <a:spcAft>
-                <a:spcPts val="0"/>
-              </a:spcAft>
-              <a:buNone/>
-            </a:pPr>
-            <a:r>
-              <a:rPr sz="1200">
-                <a:solidFill>
-                  <a:srgbClr val="202124"/>
-                </a:solidFill>
-                <a:latin typeface="Google Sans Flex SemiBold"/>
-                <a:ea typeface="Google Sans Flex SemiBold"/>
-                <a:cs typeface="Google Sans Flex SemiBold"/>
-                <a:sym typeface="Google Sans Flex SemiBold"/>
-              </a:rPr>
-              <a:t>Analysing 1,000 calls, 5 signals each (est.)</a:t>
-            </a:r>
-          </a:p>
-        </p:txBody>
-      </p:sp>
-      <p:sp>
-        <p:nvSpPr>
-          <p:cNvPr id="130" name="TextBox 129"/>
-          <p:cNvSpPr txBox="1"/>
-          <p:nvPr/>
-        </p:nvSpPr>
-        <p:spPr>
-          <a:xfrm>
-            <a:off x="274320" y="4434840"/>
-            <a:ext cx="4846320" cy="365760"/>
-          </a:xfrm>
-          <a:prstGeom prst="rect">
-            <a:avLst/>
-          </a:prstGeom>
-          <a:noFill/>
-        </p:spPr>
-        <p:txBody>
-          <a:bodyPr wrap="square" lIns="36576" rIns="36576" tIns="27432" bIns="27432" anchor="t">
-            <a:spAutoFit/>
-          </a:bodyPr>
-          <a:lstStyle/>
-          <a:p>
-            <a:pPr algn="l">
-              <a:spcAft>
-                <a:spcPts val="0"/>
-              </a:spcAft>
-              <a:buNone/>
-            </a:pPr>
-            <a:r>
-              <a:rPr sz="1100">
-                <a:solidFill>
-                  <a:srgbClr val="5F6368"/>
-                </a:solidFill>
-                <a:latin typeface="Google Sans Flex"/>
-                <a:ea typeface="Google Sans Flex"/>
-                <a:cs typeface="Google Sans Flex"/>
-                <a:sym typeface="Google Sans Flex"/>
-              </a:rPr>
-              <a:t>Same ~1,100-token call with ~150 output tokens on Gemini. List prices; estimates.</a:t>
-            </a:r>
-          </a:p>
-        </p:txBody>
-      </p:sp>
-      <p:sp>
-        <p:nvSpPr>
-          <p:cNvPr id="131" name="Rounded Rectangle 130"/>
-          <p:cNvSpPr/>
-          <p:nvPr/>
-        </p:nvSpPr>
-        <p:spPr>
-          <a:xfrm>
-            <a:off x="5394960" y="1280160"/>
-            <a:ext cx="3474720" cy="1078992"/>
-          </a:xfrm>
-          <a:prstGeom prst="roundRect">
-            <a:avLst>
-              <a:gd name="adj" fmla="val 6000"/>
-            </a:avLst>
-          </a:prstGeom>
-          <a:solidFill>
-            <a:srgbClr val="E8F0FE"/>
-          </a:solidFill>
-          <a:ln>
-            <a:noFill/>
-          </a:ln>
-          <a:effectLst/>
-        </p:spPr>
-        <p:style>
-          <a:lnRef idx="1">
-            <a:schemeClr val="accent1"/>
-          </a:lnRef>
-          <a:fillRef idx="3">
-            <a:schemeClr val="accent1"/>
-          </a:fillRef>
-          <a:effectRef idx="2">
-            <a:schemeClr val="accent1"/>
-          </a:effectRef>
-          <a:fontRef idx="minor">
-            <a:schemeClr val="lt1"/>
-          </a:fontRef>
-        </p:style>
-        <p:txBody>
-          <a:bodyPr rtlCol="0" anchor="ctr"/>
-          <a:lstStyle/>
-          <a:p>
-            <a:pPr algn="ctr"/>
-          </a:p>
-        </p:txBody>
-      </p:sp>
-      <p:sp>
-        <p:nvSpPr>
-          <p:cNvPr id="132" name="TextBox 131"/>
-          <p:cNvSpPr txBox="1"/>
-          <p:nvPr/>
-        </p:nvSpPr>
-        <p:spPr>
-          <a:xfrm>
-            <a:off x="5532120" y="1353312"/>
-            <a:ext cx="3200400" cy="457200"/>
-          </a:xfrm>
-          <a:prstGeom prst="rect">
-            <a:avLst/>
-          </a:prstGeom>
-          <a:noFill/>
-        </p:spPr>
-        <p:txBody>
-          <a:bodyPr wrap="square" lIns="36576" rIns="36576" tIns="27432" bIns="27432" anchor="ctr">
-            <a:spAutoFit/>
-          </a:bodyPr>
-          <a:lstStyle/>
-          <a:p>
-            <a:pPr algn="l">
-              <a:spcAft>
-                <a:spcPts val="0"/>
-              </a:spcAft>
-              <a:buNone/>
-            </a:pPr>
-            <a:r>
-              <a:rPr sz="2200">
-                <a:solidFill>
-                  <a:srgbClr val="1A73E8"/>
-                </a:solidFill>
-                <a:latin typeface="Google Sans Flex SemiBold"/>
-                <a:ea typeface="Google Sans Flex SemiBold"/>
-                <a:cs typeface="Google Sans Flex SemiBold"/>
-                <a:sym typeface="Google Sans Flex SemiBold"/>
-              </a:rPr>
-              <a:t>≈ $0.00005</a:t>
-            </a:r>
-          </a:p>
-        </p:txBody>
-      </p:sp>
-      <p:sp>
-        <p:nvSpPr>
-          <p:cNvPr id="133" name="TextBox 132"/>
-          <p:cNvSpPr txBox="1"/>
-          <p:nvPr/>
-        </p:nvSpPr>
-        <p:spPr>
-          <a:xfrm>
-            <a:off x="5532120" y="1847088"/>
-            <a:ext cx="3200400" cy="475488"/>
-          </a:xfrm>
-          <a:prstGeom prst="rect">
-            <a:avLst/>
-          </a:prstGeom>
-          <a:noFill/>
-        </p:spPr>
-        <p:txBody>
-          <a:bodyPr wrap="square" lIns="36576" rIns="36576" tIns="27432" bIns="27432" anchor="t">
-            <a:spAutoFit/>
-          </a:bodyPr>
-          <a:lstStyle/>
-          <a:p>
-            <a:pPr algn="l">
-              <a:spcAft>
-                <a:spcPts val="0"/>
-              </a:spcAft>
-              <a:buNone/>
-            </a:pPr>
-            <a:r>
-              <a:rPr sz="1200">
-                <a:solidFill>
-                  <a:srgbClr val="202124"/>
-                </a:solidFill>
-                <a:latin typeface="Google Sans Flex"/>
-                <a:ea typeface="Google Sans Flex"/>
-                <a:cs typeface="Google Sans Flex"/>
-                <a:sym typeface="Google Sans Flex"/>
-              </a:rPr>
-              <a:t>per 5-signal call on Jev (~1,100 input tokens)</a:t>
-            </a:r>
-          </a:p>
-        </p:txBody>
-      </p:sp>
-      <p:sp>
-        <p:nvSpPr>
-          <p:cNvPr id="134" name="Rounded Rectangle 133"/>
-          <p:cNvSpPr/>
-          <p:nvPr/>
-        </p:nvSpPr>
-        <p:spPr>
-          <a:xfrm>
-            <a:off x="5394960" y="2450591"/>
-            <a:ext cx="3474720" cy="1078992"/>
-          </a:xfrm>
-          <a:prstGeom prst="roundRect">
-            <a:avLst>
-              <a:gd name="adj" fmla="val 6000"/>
-            </a:avLst>
-          </a:prstGeom>
-          <a:solidFill>
-            <a:srgbClr val="E6F4EA"/>
-          </a:solidFill>
-          <a:ln>
-            <a:noFill/>
-          </a:ln>
-          <a:effectLst/>
-        </p:spPr>
-        <p:style>
-          <a:lnRef idx="1">
-            <a:schemeClr val="accent1"/>
-          </a:lnRef>
-          <a:fillRef idx="3">
-            <a:schemeClr val="accent1"/>
-          </a:fillRef>
-          <a:effectRef idx="2">
-            <a:schemeClr val="accent1"/>
-          </a:effectRef>
-          <a:fontRef idx="minor">
-            <a:schemeClr val="lt1"/>
-          </a:fontRef>
-        </p:style>
-        <p:txBody>
-          <a:bodyPr rtlCol="0" anchor="ctr"/>
-          <a:lstStyle/>
-          <a:p>
-            <a:pPr algn="ctr"/>
-          </a:p>
-        </p:txBody>
-      </p:sp>
-      <p:sp>
-        <p:nvSpPr>
-          <p:cNvPr id="135" name="TextBox 134"/>
-          <p:cNvSpPr txBox="1"/>
-          <p:nvPr/>
-        </p:nvSpPr>
-        <p:spPr>
-          <a:xfrm>
-            <a:off x="5532120" y="2523744"/>
-            <a:ext cx="3200400" cy="457200"/>
-          </a:xfrm>
-          <a:prstGeom prst="rect">
-            <a:avLst/>
-          </a:prstGeom>
-          <a:noFill/>
-        </p:spPr>
-        <p:txBody>
-          <a:bodyPr wrap="square" lIns="36576" rIns="36576" tIns="27432" bIns="27432" anchor="ctr">
-            <a:spAutoFit/>
-          </a:bodyPr>
-          <a:lstStyle/>
-          <a:p>
-            <a:pPr algn="l">
-              <a:spcAft>
-                <a:spcPts val="0"/>
-              </a:spcAft>
-              <a:buNone/>
-            </a:pPr>
-            <a:r>
-              <a:rPr sz="2200">
-                <a:solidFill>
-                  <a:srgbClr val="188038"/>
-                </a:solidFill>
-                <a:latin typeface="Google Sans Flex SemiBold"/>
-                <a:ea typeface="Google Sans Flex SemiBold"/>
-                <a:cs typeface="Google Sans Flex SemiBold"/>
-                <a:sym typeface="Google Sans Flex SemiBold"/>
-              </a:rPr>
-              <a:t>≈ $0.02</a:t>
-            </a:r>
-          </a:p>
-        </p:txBody>
-      </p:sp>
-      <p:sp>
-        <p:nvSpPr>
-          <p:cNvPr id="136" name="TextBox 135"/>
-          <p:cNvSpPr txBox="1"/>
-          <p:nvPr/>
-        </p:nvSpPr>
-        <p:spPr>
-          <a:xfrm>
-            <a:off x="5532120" y="3017520"/>
-            <a:ext cx="3200400" cy="475488"/>
-          </a:xfrm>
-          <a:prstGeom prst="rect">
-            <a:avLst/>
-          </a:prstGeom>
-          <a:noFill/>
-        </p:spPr>
-        <p:txBody>
-          <a:bodyPr wrap="square" lIns="36576" rIns="36576" tIns="27432" bIns="27432" anchor="t">
-            <a:spAutoFit/>
-          </a:bodyPr>
-          <a:lstStyle/>
-          <a:p>
-            <a:pPr algn="l">
-              <a:spcAft>
-                <a:spcPts val="0"/>
-              </a:spcAft>
-              <a:buNone/>
-            </a:pPr>
-            <a:r>
-              <a:rPr sz="1200">
-                <a:solidFill>
-                  <a:srgbClr val="202124"/>
-                </a:solidFill>
-                <a:latin typeface="Google Sans Flex"/>
-                <a:ea typeface="Google Sans Flex"/>
-                <a:cs typeface="Google Sans Flex"/>
-                <a:sym typeface="Google Sans Flex"/>
-              </a:rPr>
-              <a:t>to transcribe a 10-minute recording on Gemini 3.8 Flash</a:t>
-            </a:r>
-          </a:p>
-        </p:txBody>
-      </p:sp>
-      <p:sp>
-        <p:nvSpPr>
-          <p:cNvPr id="137" name="Rounded Rectangle 136"/>
-          <p:cNvSpPr/>
-          <p:nvPr/>
-        </p:nvSpPr>
-        <p:spPr>
-          <a:xfrm>
-            <a:off x="5394960" y="3621024"/>
-            <a:ext cx="3474720" cy="1078992"/>
-          </a:xfrm>
-          <a:prstGeom prst="roundRect">
-            <a:avLst>
-              <a:gd name="adj" fmla="val 6000"/>
-            </a:avLst>
-          </a:prstGeom>
-          <a:solidFill>
-            <a:srgbClr val="FEF7E0"/>
-          </a:solidFill>
-          <a:ln>
-            <a:noFill/>
-          </a:ln>
-          <a:effectLst/>
-        </p:spPr>
-        <p:style>
-          <a:lnRef idx="1">
-            <a:schemeClr val="accent1"/>
-          </a:lnRef>
-          <a:fillRef idx="3">
-            <a:schemeClr val="accent1"/>
-          </a:fillRef>
-          <a:effectRef idx="2">
-            <a:schemeClr val="accent1"/>
-          </a:effectRef>
-          <a:fontRef idx="minor">
-            <a:schemeClr val="lt1"/>
-          </a:fontRef>
-        </p:style>
-        <p:txBody>
-          <a:bodyPr rtlCol="0" anchor="ctr"/>
-          <a:lstStyle/>
-          <a:p>
-            <a:pPr algn="ctr"/>
-          </a:p>
-        </p:txBody>
-      </p:sp>
-      <p:sp>
-        <p:nvSpPr>
-          <p:cNvPr id="138" name="TextBox 137"/>
-          <p:cNvSpPr txBox="1"/>
-          <p:nvPr/>
-        </p:nvSpPr>
-        <p:spPr>
-          <a:xfrm>
-            <a:off x="5532120" y="3694176"/>
-            <a:ext cx="3200400" cy="457200"/>
-          </a:xfrm>
-          <a:prstGeom prst="rect">
-            <a:avLst/>
-          </a:prstGeom>
-          <a:noFill/>
-        </p:spPr>
-        <p:txBody>
-          <a:bodyPr wrap="square" lIns="36576" rIns="36576" tIns="27432" bIns="27432" anchor="ctr">
-            <a:spAutoFit/>
-          </a:bodyPr>
-          <a:lstStyle/>
-          <a:p>
-            <a:pPr algn="l">
-              <a:spcAft>
-                <a:spcPts val="0"/>
-              </a:spcAft>
-              <a:buNone/>
-            </a:pPr>
-            <a:r>
-              <a:rPr sz="2200">
-                <a:solidFill>
-                  <a:srgbClr val="B06000"/>
-                </a:solidFill>
-                <a:latin typeface="Google Sans Flex SemiBold"/>
-                <a:ea typeface="Google Sans Flex SemiBold"/>
-                <a:cs typeface="Google Sans Flex SemiBold"/>
-                <a:sym typeface="Google Sans Flex SemiBold"/>
-              </a:rPr>
-              <a:t>≈ $0</a:t>
-            </a:r>
-          </a:p>
-        </p:txBody>
-      </p:sp>
-      <p:sp>
-        <p:nvSpPr>
-          <p:cNvPr id="139" name="TextBox 138"/>
-          <p:cNvSpPr txBox="1"/>
-          <p:nvPr/>
-        </p:nvSpPr>
-        <p:spPr>
-          <a:xfrm>
-            <a:off x="5532120" y="4187952"/>
-            <a:ext cx="3200400" cy="475488"/>
-          </a:xfrm>
-          <a:prstGeom prst="rect">
-            <a:avLst/>
-          </a:prstGeom>
-          <a:noFill/>
-        </p:spPr>
-        <p:txBody>
-          <a:bodyPr wrap="square" lIns="36576" rIns="36576" tIns="27432" bIns="27432" anchor="t">
-            <a:spAutoFit/>
-          </a:bodyPr>
-          <a:lstStyle/>
-          <a:p>
-            <a:pPr algn="l">
-              <a:spcAft>
-                <a:spcPts val="0"/>
-              </a:spcAft>
-              <a:buNone/>
-            </a:pPr>
-            <a:r>
-              <a:rPr sz="1200">
-                <a:solidFill>
-                  <a:srgbClr val="202124"/>
-                </a:solidFill>
-                <a:latin typeface="Google Sans Flex"/>
-                <a:ea typeface="Google Sans Flex"/>
-                <a:cs typeface="Google Sans Flex"/>
-                <a:sym typeface="Google Sans Flex"/>
-              </a:rPr>
-              <a:t>Google Cloud infra at demo scale (free tiers)</a:t>
-            </a:r>
-          </a:p>
-        </p:txBody>
-      </p:sp>
-    </p:spTree>
-  </p:cSld>
-  <p:clrMapOvr>
-    <a:masterClrMapping/>
-  </p:clrMapOvr>
-</p:sld>
-</file>
-
-<file path=ppt/slides/slide11.xml><?xml version="1.0" encoding="utf-8"?>
-<p:sld xmlns:a="http://schemas.openxmlformats.org/drawingml/2006/main" xmlns:r="http://schemas.openxmlformats.org/officeDocument/2006/relationships" xmlns:mc="http://schemas.openxmlformats.org/markup-compatibility/2006" xmlns:mv="urn:schemas-microsoft-com:mac:vml" xmlns:p="http://schemas.openxmlformats.org/presentationml/2006/main" xmlns:c="http://schemas.openxmlformats.org/drawingml/2006/chart" xmlns:dgm="http://schemas.openxmlformats.org/drawingml/2006/diagram" xmlns:o="urn:schemas-microsoft-com:office:office" xmlns:v="urn:schemas-microsoft-com:vml" xmlns:pvml="urn:schemas-microsoft-com:office:powerpoint" xmlns:com="http://schemas.openxmlformats.org/drawingml/2006/compatibility" xmlns:p14="http://schemas.microsoft.com/office/powerpoint/2010/main" xmlns:p15="http://schemas.microsoft.com/office/powerpoint/2012/main" xmlns:ahyp="http://schemas.microsoft.com/office/drawing/2018/hyperlinkcolor">
-  <p:cSld>
-    <p:spTree>
-      <p:nvGrpSpPr>
         <p:cNvPr id="131" name="Shape 131"/>
         <p:cNvGrpSpPr/>
         <p:nvPr/>
@@ -8708,7 +8033,7 @@
 </p:sld>
 </file>
 
-<file path=ppt/slides/slide12.xml><?xml version="1.0" encoding="utf-8"?>
+<file path=ppt/slides/slide11.xml><?xml version="1.0" encoding="utf-8"?>
 <p:sld xmlns:a="http://schemas.openxmlformats.org/drawingml/2006/main" xmlns:r="http://schemas.openxmlformats.org/officeDocument/2006/relationships" xmlns:mc="http://schemas.openxmlformats.org/markup-compatibility/2006" xmlns:mv="urn:schemas-microsoft-com:mac:vml" xmlns:p="http://schemas.openxmlformats.org/presentationml/2006/main" xmlns:c="http://schemas.openxmlformats.org/drawingml/2006/chart" xmlns:dgm="http://schemas.openxmlformats.org/drawingml/2006/diagram" xmlns:o="urn:schemas-microsoft-com:office:office" xmlns:v="urn:schemas-microsoft-com:vml" xmlns:pvml="urn:schemas-microsoft-com:office:powerpoint" xmlns:com="http://schemas.openxmlformats.org/drawingml/2006/compatibility" xmlns:p14="http://schemas.microsoft.com/office/powerpoint/2010/main" xmlns:p15="http://schemas.microsoft.com/office/powerpoint/2012/main" xmlns:ahyp="http://schemas.microsoft.com/office/drawing/2018/hyperlinkcolor">
   <p:cSld>
     <p:spTree>
@@ -9808,7 +9133,7 @@
 </p:sld>
 </file>
 
-<file path=ppt/slides/slide13.xml><?xml version="1.0" encoding="utf-8"?>
+<file path=ppt/slides/slide12.xml><?xml version="1.0" encoding="utf-8"?>
 <p:sld xmlns:a="http://schemas.openxmlformats.org/drawingml/2006/main" xmlns:r="http://schemas.openxmlformats.org/officeDocument/2006/relationships" xmlns:mc="http://schemas.openxmlformats.org/markup-compatibility/2006" xmlns:mv="urn:schemas-microsoft-com:mac:vml" xmlns:p="http://schemas.openxmlformats.org/presentationml/2006/main" xmlns:c="http://schemas.openxmlformats.org/drawingml/2006/chart" xmlns:dgm="http://schemas.openxmlformats.org/drawingml/2006/diagram" xmlns:o="urn:schemas-microsoft-com:office:office" xmlns:v="urn:schemas-microsoft-com:vml" xmlns:pvml="urn:schemas-microsoft-com:office:powerpoint" xmlns:com="http://schemas.openxmlformats.org/drawingml/2006/compatibility" xmlns:p14="http://schemas.microsoft.com/office/powerpoint/2010/main" xmlns:p15="http://schemas.microsoft.com/office/powerpoint/2012/main" xmlns:ahyp="http://schemas.microsoft.com/office/drawing/2018/hyperlinkcolor">
   <p:cSld>
     <p:spTree>
@@ -11527,7 +10852,7 @@
 </p:sld>
 </file>
 
-<file path=ppt/slides/slide14.xml><?xml version="1.0" encoding="utf-8"?>
+<file path=ppt/slides/slide13.xml><?xml version="1.0" encoding="utf-8"?>
 <p:sld xmlns:a="http://schemas.openxmlformats.org/drawingml/2006/main" xmlns:r="http://schemas.openxmlformats.org/officeDocument/2006/relationships" xmlns:mc="http://schemas.openxmlformats.org/markup-compatibility/2006" xmlns:mv="urn:schemas-microsoft-com:mac:vml" xmlns:p="http://schemas.openxmlformats.org/presentationml/2006/main" xmlns:c="http://schemas.openxmlformats.org/drawingml/2006/chart" xmlns:dgm="http://schemas.openxmlformats.org/drawingml/2006/diagram" xmlns:o="urn:schemas-microsoft-com:office:office" xmlns:v="urn:schemas-microsoft-com:vml" xmlns:pvml="urn:schemas-microsoft-com:office:powerpoint" xmlns:com="http://schemas.openxmlformats.org/drawingml/2006/compatibility" xmlns:p14="http://schemas.microsoft.com/office/powerpoint/2010/main" xmlns:p15="http://schemas.microsoft.com/office/powerpoint/2012/main" xmlns:ahyp="http://schemas.microsoft.com/office/drawing/2018/hyperlinkcolor">
   <p:cSld>
     <p:spTree>
@@ -11881,8 +11206,9 @@
                 <a:ea typeface="Google Sans Flex SemiBold"/>
                 <a:cs typeface="Google Sans Flex SemiBold"/>
                 <a:sym typeface="Google Sans Flex SemiBold"/>
-              </a:rPr>
-              <a:t>[GitHub link]</a:t>
+                <a:hlinkClick r:id="rId6"/>
+              </a:rPr>
+              <a:t>https://github.com/Siddamnn/aftercall</a:t>
             </a:r>
           </a:p>
         </p:txBody>
@@ -12325,7 +11651,7 @@
 </p:sld>
 </file>
 
-<file path=ppt/slides/slide15.xml><?xml version="1.0" encoding="utf-8"?>
+<file path=ppt/slides/slide14.xml><?xml version="1.0" encoding="utf-8"?>
 <p:sld xmlns:a="http://schemas.openxmlformats.org/drawingml/2006/main" xmlns:r="http://schemas.openxmlformats.org/officeDocument/2006/relationships" xmlns:mc="http://schemas.openxmlformats.org/markup-compatibility/2006" xmlns:mv="urn:schemas-microsoft-com:mac:vml" xmlns:p="http://schemas.openxmlformats.org/presentationml/2006/main" xmlns:c="http://schemas.openxmlformats.org/drawingml/2006/chart" xmlns:dgm="http://schemas.openxmlformats.org/drawingml/2006/diagram" xmlns:o="urn:schemas-microsoft-com:office:office" xmlns:v="urn:schemas-microsoft-com:vml" xmlns:pvml="urn:schemas-microsoft-com:office:powerpoint" xmlns:com="http://schemas.openxmlformats.org/drawingml/2006/compatibility" xmlns:p14="http://schemas.microsoft.com/office/powerpoint/2010/main" xmlns:p15="http://schemas.microsoft.com/office/powerpoint/2012/main" xmlns:ahyp="http://schemas.microsoft.com/office/drawing/2018/hyperlinkcolor">
   <p:cSld>
     <p:spTree>
@@ -13034,7 +12360,7 @@
 </p:sld>
 </file>
 
-<file path=ppt/slides/slide16.xml><?xml version="1.0" encoding="utf-8"?>
+<file path=ppt/slides/slide15.xml><?xml version="1.0" encoding="utf-8"?>
 <p:sld xmlns:a="http://schemas.openxmlformats.org/drawingml/2006/main" xmlns:r="http://schemas.openxmlformats.org/officeDocument/2006/relationships" xmlns:mc="http://schemas.openxmlformats.org/markup-compatibility/2006" xmlns:mv="urn:schemas-microsoft-com:mac:vml" xmlns:p="http://schemas.openxmlformats.org/presentationml/2006/main" xmlns:c="http://schemas.openxmlformats.org/drawingml/2006/chart" xmlns:dgm="http://schemas.openxmlformats.org/drawingml/2006/diagram" xmlns:o="urn:schemas-microsoft-com:office:office" xmlns:v="urn:schemas-microsoft-com:vml" xmlns:pvml="urn:schemas-microsoft-com:office:powerpoint" xmlns:com="http://schemas.openxmlformats.org/drawingml/2006/compatibility" xmlns:p14="http://schemas.microsoft.com/office/powerpoint/2010/main" xmlns:p15="http://schemas.microsoft.com/office/powerpoint/2012/main" xmlns:ahyp="http://schemas.microsoft.com/office/drawing/2018/hyperlinkcolor">
   <p:cSld>
     <p:spTree>
@@ -13114,7 +12440,7 @@
 </p:sld>
 </file>
 
-<file path=ppt/slides/slide3.xml><?xml version="1.0" encoding="utf-8"?>
+<file path=ppt/slides/slide2.xml><?xml version="1.0" encoding="utf-8"?>
 <p:sld xmlns:a="http://schemas.openxmlformats.org/drawingml/2006/main" xmlns:r="http://schemas.openxmlformats.org/officeDocument/2006/relationships" xmlns:mc="http://schemas.openxmlformats.org/markup-compatibility/2006" xmlns:mv="urn:schemas-microsoft-com:mac:vml" xmlns:p="http://schemas.openxmlformats.org/presentationml/2006/main" xmlns:c="http://schemas.openxmlformats.org/drawingml/2006/chart" xmlns:dgm="http://schemas.openxmlformats.org/drawingml/2006/diagram" xmlns:o="urn:schemas-microsoft-com:office:office" xmlns:v="urn:schemas-microsoft-com:vml" xmlns:pvml="urn:schemas-microsoft-com:office:powerpoint" xmlns:com="http://schemas.openxmlformats.org/drawingml/2006/compatibility" xmlns:p14="http://schemas.microsoft.com/office/powerpoint/2010/main" xmlns:p15="http://schemas.microsoft.com/office/powerpoint/2012/main" xmlns:ahyp="http://schemas.microsoft.com/office/drawing/2018/hyperlinkcolor">
   <p:cSld>
     <p:spTree>
@@ -14417,7 +13743,7 @@
 </p:sld>
 </file>
 
-<file path=ppt/slides/slide4.xml><?xml version="1.0" encoding="utf-8"?>
+<file path=ppt/slides/slide3.xml><?xml version="1.0" encoding="utf-8"?>
 <p:sld xmlns:a="http://schemas.openxmlformats.org/drawingml/2006/main" xmlns:r="http://schemas.openxmlformats.org/officeDocument/2006/relationships" xmlns:mc="http://schemas.openxmlformats.org/markup-compatibility/2006" xmlns:mv="urn:schemas-microsoft-com:mac:vml" xmlns:p="http://schemas.openxmlformats.org/presentationml/2006/main" xmlns:c="http://schemas.openxmlformats.org/drawingml/2006/chart" xmlns:dgm="http://schemas.openxmlformats.org/drawingml/2006/diagram" xmlns:o="urn:schemas-microsoft-com:office:office" xmlns:v="urn:schemas-microsoft-com:vml" xmlns:pvml="urn:schemas-microsoft-com:office:powerpoint" xmlns:com="http://schemas.openxmlformats.org/drawingml/2006/compatibility" xmlns:p14="http://schemas.microsoft.com/office/powerpoint/2010/main" xmlns:p15="http://schemas.microsoft.com/office/powerpoint/2012/main" xmlns:ahyp="http://schemas.microsoft.com/office/drawing/2018/hyperlinkcolor">
   <p:cSld>
     <p:spTree>
@@ -15363,7 +14689,7 @@
 </p:sld>
 </file>
 
-<file path=ppt/slides/slide5.xml><?xml version="1.0" encoding="utf-8"?>
+<file path=ppt/slides/slide4.xml><?xml version="1.0" encoding="utf-8"?>
 <p:sld xmlns:a="http://schemas.openxmlformats.org/drawingml/2006/main" xmlns:r="http://schemas.openxmlformats.org/officeDocument/2006/relationships" xmlns:mc="http://schemas.openxmlformats.org/markup-compatibility/2006" xmlns:mv="urn:schemas-microsoft-com:mac:vml" xmlns:p="http://schemas.openxmlformats.org/presentationml/2006/main" xmlns:c="http://schemas.openxmlformats.org/drawingml/2006/chart" xmlns:dgm="http://schemas.openxmlformats.org/drawingml/2006/diagram" xmlns:o="urn:schemas-microsoft-com:office:office" xmlns:v="urn:schemas-microsoft-com:vml" xmlns:pvml="urn:schemas-microsoft-com:office:powerpoint" xmlns:com="http://schemas.openxmlformats.org/drawingml/2006/compatibility" xmlns:p14="http://schemas.microsoft.com/office/powerpoint/2010/main" xmlns:p15="http://schemas.microsoft.com/office/powerpoint/2012/main" xmlns:ahyp="http://schemas.microsoft.com/office/drawing/2018/hyperlinkcolor">
   <p:cSld>
     <p:spTree>
@@ -17275,7 +16601,7 @@
 </p:sld>
 </file>
 
-<file path=ppt/slides/slide6.xml><?xml version="1.0" encoding="utf-8"?>
+<file path=ppt/slides/slide5.xml><?xml version="1.0" encoding="utf-8"?>
 <p:sld xmlns:a="http://schemas.openxmlformats.org/drawingml/2006/main" xmlns:r="http://schemas.openxmlformats.org/officeDocument/2006/relationships" xmlns:mc="http://schemas.openxmlformats.org/markup-compatibility/2006" xmlns:mv="urn:schemas-microsoft-com:mac:vml" xmlns:p="http://schemas.openxmlformats.org/presentationml/2006/main" xmlns:c="http://schemas.openxmlformats.org/drawingml/2006/chart" xmlns:dgm="http://schemas.openxmlformats.org/drawingml/2006/diagram" xmlns:o="urn:schemas-microsoft-com:office:office" xmlns:v="urn:schemas-microsoft-com:vml" xmlns:pvml="urn:schemas-microsoft-com:office:powerpoint" xmlns:com="http://schemas.openxmlformats.org/drawingml/2006/compatibility" xmlns:p14="http://schemas.microsoft.com/office/powerpoint/2010/main" xmlns:p15="http://schemas.microsoft.com/office/powerpoint/2012/main" xmlns:ahyp="http://schemas.microsoft.com/office/drawing/2018/hyperlinkcolor">
   <p:cSld>
     <p:spTree>
@@ -19578,7 +18904,7 @@
 </p:sld>
 </file>
 
-<file path=ppt/slides/slide7.xml><?xml version="1.0" encoding="utf-8"?>
+<file path=ppt/slides/slide6.xml><?xml version="1.0" encoding="utf-8"?>
 <p:sld xmlns:a="http://schemas.openxmlformats.org/drawingml/2006/main" xmlns:r="http://schemas.openxmlformats.org/officeDocument/2006/relationships" xmlns:mc="http://schemas.openxmlformats.org/markup-compatibility/2006" xmlns:mv="urn:schemas-microsoft-com:mac:vml" xmlns:p="http://schemas.openxmlformats.org/presentationml/2006/main" xmlns:c="http://schemas.openxmlformats.org/drawingml/2006/chart" xmlns:dgm="http://schemas.openxmlformats.org/drawingml/2006/diagram" xmlns:o="urn:schemas-microsoft-com:office:office" xmlns:v="urn:schemas-microsoft-com:vml" xmlns:pvml="urn:schemas-microsoft-com:office:powerpoint" xmlns:com="http://schemas.openxmlformats.org/drawingml/2006/compatibility" xmlns:p14="http://schemas.microsoft.com/office/powerpoint/2010/main" xmlns:p15="http://schemas.microsoft.com/office/powerpoint/2012/main" xmlns:ahyp="http://schemas.microsoft.com/office/drawing/2018/hyperlinkcolor">
   <p:cSld>
     <p:spTree>
@@ -21485,7 +20811,7 @@
 </p:sld>
 </file>
 
-<file path=ppt/slides/slide8.xml><?xml version="1.0" encoding="utf-8"?>
+<file path=ppt/slides/slide7.xml><?xml version="1.0" encoding="utf-8"?>
 <p:sld xmlns:a="http://schemas.openxmlformats.org/drawingml/2006/main" xmlns:r="http://schemas.openxmlformats.org/officeDocument/2006/relationships" xmlns:mc="http://schemas.openxmlformats.org/markup-compatibility/2006" xmlns:mv="urn:schemas-microsoft-com:mac:vml" xmlns:p="http://schemas.openxmlformats.org/presentationml/2006/main" xmlns:c="http://schemas.openxmlformats.org/drawingml/2006/chart" xmlns:dgm="http://schemas.openxmlformats.org/drawingml/2006/diagram" xmlns:o="urn:schemas-microsoft-com:office:office" xmlns:v="urn:schemas-microsoft-com:vml" xmlns:pvml="urn:schemas-microsoft-com:office:powerpoint" xmlns:com="http://schemas.openxmlformats.org/drawingml/2006/compatibility" xmlns:p14="http://schemas.microsoft.com/office/powerpoint/2010/main" xmlns:p15="http://schemas.microsoft.com/office/powerpoint/2012/main" xmlns:ahyp="http://schemas.microsoft.com/office/drawing/2018/hyperlinkcolor">
   <p:cSld>
     <p:spTree>
@@ -22948,7 +22274,7 @@
 </p:sld>
 </file>
 
-<file path=ppt/slides/slide9.xml><?xml version="1.0" encoding="utf-8"?>
+<file path=ppt/slides/slide8.xml><?xml version="1.0" encoding="utf-8"?>
 <p:sld xmlns:a="http://schemas.openxmlformats.org/drawingml/2006/main" xmlns:r="http://schemas.openxmlformats.org/officeDocument/2006/relationships" xmlns:mc="http://schemas.openxmlformats.org/markup-compatibility/2006" xmlns:mv="urn:schemas-microsoft-com:mac:vml" xmlns:p="http://schemas.openxmlformats.org/presentationml/2006/main" xmlns:c="http://schemas.openxmlformats.org/drawingml/2006/chart" xmlns:dgm="http://schemas.openxmlformats.org/drawingml/2006/diagram" xmlns:o="urn:schemas-microsoft-com:office:office" xmlns:v="urn:schemas-microsoft-com:vml" xmlns:pvml="urn:schemas-microsoft-com:office:powerpoint" xmlns:com="http://schemas.openxmlformats.org/drawingml/2006/compatibility" xmlns:p14="http://schemas.microsoft.com/office/powerpoint/2010/main" xmlns:p15="http://schemas.microsoft.com/office/powerpoint/2012/main" xmlns:ahyp="http://schemas.microsoft.com/office/drawing/2018/hyperlinkcolor">
   <p:cSld>
     <p:spTree>
@@ -24116,6 +23442,681 @@
                 <a:sym typeface="Google Sans Flex"/>
               </a:rPr>
               <a:t>Python 3.12 · FastAPI · pydantic</a:t>
+            </a:r>
+          </a:p>
+        </p:txBody>
+      </p:sp>
+    </p:spTree>
+  </p:cSld>
+  <p:clrMapOvr>
+    <a:masterClrMapping/>
+  </p:clrMapOvr>
+</p:sld>
+</file>
+
+<file path=ppt/slides/slide9.xml><?xml version="1.0" encoding="utf-8"?>
+<p:sld xmlns:a="http://schemas.openxmlformats.org/drawingml/2006/main" xmlns:r="http://schemas.openxmlformats.org/officeDocument/2006/relationships" xmlns:mc="http://schemas.openxmlformats.org/markup-compatibility/2006" xmlns:mv="urn:schemas-microsoft-com:mac:vml" xmlns:p="http://schemas.openxmlformats.org/presentationml/2006/main" xmlns:c="http://schemas.openxmlformats.org/drawingml/2006/chart" xmlns:dgm="http://schemas.openxmlformats.org/drawingml/2006/diagram" xmlns:o="urn:schemas-microsoft-com:office:office" xmlns:v="urn:schemas-microsoft-com:vml" xmlns:pvml="urn:schemas-microsoft-com:office:powerpoint" xmlns:com="http://schemas.openxmlformats.org/drawingml/2006/compatibility" xmlns:p14="http://schemas.microsoft.com/office/powerpoint/2010/main" xmlns:p15="http://schemas.microsoft.com/office/powerpoint/2012/main" xmlns:ahyp="http://schemas.microsoft.com/office/drawing/2018/hyperlinkcolor">
+  <p:cSld>
+    <p:spTree>
+      <p:nvGrpSpPr>
+        <p:cNvPr id="123" name="Shape 123"/>
+        <p:cNvGrpSpPr/>
+        <p:nvPr/>
+      </p:nvGrpSpPr>
+      <p:grpSpPr>
+        <a:xfrm>
+          <a:off x="0" y="0"/>
+          <a:ext cx="0" cy="0"/>
+          <a:chOff x="0" y="0"/>
+          <a:chExt cx="0" cy="0"/>
+        </a:xfrm>
+      </p:grpSpPr>
+      <p:pic>
+        <p:nvPicPr>
+          <p:cNvPr id="124" name="Google Shape;124;p22" title="Frame 144.png"/>
+          <p:cNvPicPr preferRelativeResize="0"/>
+          <p:nvPr/>
+        </p:nvPicPr>
+        <p:blipFill rotWithShape="1">
+          <a:blip r:embed="rId3">
+            <a:alphaModFix/>
+          </a:blip>
+          <a:srcRect b="98001" l="0" r="0" t="0"/>
+          <a:stretch/>
+        </p:blipFill>
+        <p:spPr>
+          <a:xfrm>
+            <a:off x="0" y="5093562"/>
+            <a:ext cx="9144000" cy="54275"/>
+          </a:xfrm>
+          <a:prstGeom prst="rect">
+            <a:avLst/>
+          </a:prstGeom>
+          <a:noFill/>
+          <a:ln>
+            <a:noFill/>
+          </a:ln>
+        </p:spPr>
+      </p:pic>
+      <p:pic>
+        <p:nvPicPr>
+          <p:cNvPr id="125" name="Google Shape;125;p22" title="Group 427319979.png"/>
+          <p:cNvPicPr preferRelativeResize="0"/>
+          <p:nvPr/>
+        </p:nvPicPr>
+        <p:blipFill>
+          <a:blip r:embed="rId4">
+            <a:alphaModFix/>
+          </a:blip>
+          <a:stretch>
+            <a:fillRect/>
+          </a:stretch>
+        </p:blipFill>
+        <p:spPr>
+          <a:xfrm>
+            <a:off x="0" y="1"/>
+            <a:ext cx="9144000" cy="507359"/>
+          </a:xfrm>
+          <a:prstGeom prst="rect">
+            <a:avLst/>
+          </a:prstGeom>
+          <a:noFill/>
+          <a:ln>
+            <a:noFill/>
+          </a:ln>
+        </p:spPr>
+      </p:pic>
+      <p:sp>
+        <p:nvSpPr>
+          <p:cNvPr id="126" name="Google Shape;126;p22"/>
+          <p:cNvSpPr/>
+          <p:nvPr/>
+        </p:nvSpPr>
+        <p:spPr>
+          <a:xfrm>
+            <a:off x="-29250" y="5071875"/>
+            <a:ext cx="9173400" cy="97800"/>
+          </a:xfrm>
+          <a:prstGeom prst="rect">
+            <a:avLst/>
+          </a:prstGeom>
+          <a:solidFill>
+            <a:schemeClr val="dk1"/>
+          </a:solidFill>
+          <a:ln>
+            <a:noFill/>
+          </a:ln>
+        </p:spPr>
+        <p:txBody>
+          <a:bodyPr anchorCtr="0" anchor="ctr" bIns="91425" lIns="91425" spcFirstLastPara="1" rIns="91425" wrap="square" tIns="91425">
+            <a:noAutofit/>
+          </a:bodyPr>
+          <a:lstStyle/>
+          <a:p>
+            <a:pPr indent="0" lvl="0" marL="0" rtl="0" algn="ctr">
+              <a:spcBef>
+                <a:spcPts val="0"/>
+              </a:spcBef>
+              <a:spcAft>
+                <a:spcPts val="0"/>
+              </a:spcAft>
+              <a:buNone/>
+            </a:pPr>
+            <a:r>
+              <a:t/>
+            </a:r>
+            <a:endParaRPr/>
+          </a:p>
+        </p:txBody>
+      </p:sp>
+      <p:sp>
+        <p:nvSpPr>
+          <p:cNvPr id="127" name="Google Shape;127;p22"/>
+          <p:cNvSpPr txBox="1"/>
+          <p:nvPr/>
+        </p:nvSpPr>
+        <p:spPr>
+          <a:xfrm>
+            <a:off x="265350" y="663825"/>
+            <a:ext cx="8943000" cy="557784"/>
+          </a:xfrm>
+          <a:prstGeom prst="rect">
+            <a:avLst/>
+          </a:prstGeom>
+          <a:noFill/>
+          <a:ln>
+            <a:noFill/>
+          </a:ln>
+        </p:spPr>
+        <p:txBody>
+          <a:bodyPr anchorCtr="0" anchor="t" bIns="91425" lIns="91425" spcFirstLastPara="1" rIns="91425" wrap="square" tIns="91425">
+            <a:noAutofit/>
+          </a:bodyPr>
+          <a:lstStyle/>
+          <a:p>
+            <a:pPr indent="0" lvl="0" marL="0" rtl="0" algn="l">
+              <a:spcBef>
+                <a:spcPts val="0"/>
+              </a:spcBef>
+              <a:spcAft>
+                <a:spcPts val="0"/>
+              </a:spcAft>
+              <a:buNone/>
+            </a:pPr>
+            <a:r>
+              <a:rPr lang="en-GB" sz="1600">
+                <a:latin typeface="Google Sans Flex Medium"/>
+                <a:ea typeface="Google Sans Flex Medium"/>
+                <a:cs typeface="Google Sans Flex Medium"/>
+                <a:sym typeface="Google Sans Flex Medium"/>
+              </a:rPr>
+              <a:t>Estimated implementation cost</a:t>
+            </a:r>
+            <a:endParaRPr sz="1600">
+              <a:latin typeface="Google Sans Flex Medium"/>
+              <a:ea typeface="Google Sans Flex Medium"/>
+              <a:cs typeface="Google Sans Flex Medium"/>
+              <a:sym typeface="Google Sans Flex Medium"/>
+            </a:endParaRPr>
+          </a:p>
+        </p:txBody>
+      </p:sp>
+      <p:graphicFrame>
+        <p:nvGraphicFramePr>
+          <p:cNvPr id="128" name="Chart 127"/>
+          <p:cNvGraphicFramePr>
+            <a:graphicFrameLocks noGrp="1"/>
+          </p:cNvGraphicFramePr>
+          <p:nvPr/>
+        </p:nvGraphicFramePr>
+        <p:xfrm>
+          <a:off x="274320" y="1600200"/>
+          <a:ext cx="4846320" cy="2788920"/>
+        </p:xfrm>
+        <a:graphic>
+          <a:graphicData uri="http://schemas.openxmlformats.org/drawingml/2006/chart">
+            <c:chart r:id="rId5"/>
+          </a:graphicData>
+        </a:graphic>
+      </p:graphicFrame>
+      <p:sp>
+        <p:nvSpPr>
+          <p:cNvPr id="129" name="TextBox 128"/>
+          <p:cNvSpPr txBox="1"/>
+          <p:nvPr/>
+        </p:nvSpPr>
+        <p:spPr>
+          <a:xfrm>
+            <a:off x="274320" y="1280160"/>
+            <a:ext cx="4846320" cy="310896"/>
+          </a:xfrm>
+          <a:prstGeom prst="rect">
+            <a:avLst/>
+          </a:prstGeom>
+          <a:noFill/>
+        </p:spPr>
+        <p:txBody>
+          <a:bodyPr wrap="square" lIns="36576" rIns="36576" tIns="27432" bIns="27432" anchor="t">
+            <a:spAutoFit/>
+          </a:bodyPr>
+          <a:lstStyle/>
+          <a:p>
+            <a:pPr algn="l">
+              <a:spcAft>
+                <a:spcPts val="0"/>
+              </a:spcAft>
+              <a:buNone/>
+            </a:pPr>
+            <a:r>
+              <a:rPr sz="1200">
+                <a:solidFill>
+                  <a:srgbClr val="202124"/>
+                </a:solidFill>
+                <a:latin typeface="Google Sans Flex SemiBold"/>
+                <a:ea typeface="Google Sans Flex SemiBold"/>
+                <a:cs typeface="Google Sans Flex SemiBold"/>
+                <a:sym typeface="Google Sans Flex SemiBold"/>
+              </a:rPr>
+              <a:t>Analysing 1,000 calls, 5 signals each (est.)</a:t>
+            </a:r>
+          </a:p>
+        </p:txBody>
+      </p:sp>
+      <p:sp>
+        <p:nvSpPr>
+          <p:cNvPr id="130" name="TextBox 129"/>
+          <p:cNvSpPr txBox="1"/>
+          <p:nvPr/>
+        </p:nvSpPr>
+        <p:spPr>
+          <a:xfrm>
+            <a:off x="274320" y="4434840"/>
+            <a:ext cx="4846320" cy="365760"/>
+          </a:xfrm>
+          <a:prstGeom prst="rect">
+            <a:avLst/>
+          </a:prstGeom>
+          <a:noFill/>
+        </p:spPr>
+        <p:txBody>
+          <a:bodyPr wrap="square" lIns="36576" rIns="36576" tIns="27432" bIns="27432" anchor="t">
+            <a:spAutoFit/>
+          </a:bodyPr>
+          <a:lstStyle/>
+          <a:p>
+            <a:pPr algn="l">
+              <a:spcAft>
+                <a:spcPts val="0"/>
+              </a:spcAft>
+              <a:buNone/>
+            </a:pPr>
+            <a:r>
+              <a:rPr sz="1100">
+                <a:solidFill>
+                  <a:srgbClr val="5F6368"/>
+                </a:solidFill>
+                <a:latin typeface="Google Sans Flex"/>
+                <a:ea typeface="Google Sans Flex"/>
+                <a:cs typeface="Google Sans Flex"/>
+                <a:sym typeface="Google Sans Flex"/>
+              </a:rPr>
+              <a:t>Same ~1,100-token call with ~150 output tokens on Gemini. List prices; estimates.</a:t>
+            </a:r>
+          </a:p>
+        </p:txBody>
+      </p:sp>
+      <p:sp>
+        <p:nvSpPr>
+          <p:cNvPr id="131" name="Rounded Rectangle 130"/>
+          <p:cNvSpPr/>
+          <p:nvPr/>
+        </p:nvSpPr>
+        <p:spPr>
+          <a:xfrm>
+            <a:off x="5394960" y="1280160"/>
+            <a:ext cx="3474720" cy="1078992"/>
+          </a:xfrm>
+          <a:prstGeom prst="roundRect">
+            <a:avLst>
+              <a:gd name="adj" fmla="val 6000"/>
+            </a:avLst>
+          </a:prstGeom>
+          <a:solidFill>
+            <a:srgbClr val="E8F0FE"/>
+          </a:solidFill>
+          <a:ln>
+            <a:noFill/>
+          </a:ln>
+          <a:effectLst/>
+        </p:spPr>
+        <p:style>
+          <a:lnRef idx="1">
+            <a:schemeClr val="accent1"/>
+          </a:lnRef>
+          <a:fillRef idx="3">
+            <a:schemeClr val="accent1"/>
+          </a:fillRef>
+          <a:effectRef idx="2">
+            <a:schemeClr val="accent1"/>
+          </a:effectRef>
+          <a:fontRef idx="minor">
+            <a:schemeClr val="lt1"/>
+          </a:fontRef>
+        </p:style>
+        <p:txBody>
+          <a:bodyPr rtlCol="0" anchor="ctr"/>
+          <a:lstStyle/>
+          <a:p>
+            <a:pPr algn="ctr"/>
+          </a:p>
+        </p:txBody>
+      </p:sp>
+      <p:sp>
+        <p:nvSpPr>
+          <p:cNvPr id="132" name="TextBox 131"/>
+          <p:cNvSpPr txBox="1"/>
+          <p:nvPr/>
+        </p:nvSpPr>
+        <p:spPr>
+          <a:xfrm>
+            <a:off x="5532120" y="1353312"/>
+            <a:ext cx="3200400" cy="457200"/>
+          </a:xfrm>
+          <a:prstGeom prst="rect">
+            <a:avLst/>
+          </a:prstGeom>
+          <a:noFill/>
+        </p:spPr>
+        <p:txBody>
+          <a:bodyPr wrap="square" lIns="36576" rIns="36576" tIns="27432" bIns="27432" anchor="ctr">
+            <a:spAutoFit/>
+          </a:bodyPr>
+          <a:lstStyle/>
+          <a:p>
+            <a:pPr algn="l">
+              <a:spcAft>
+                <a:spcPts val="0"/>
+              </a:spcAft>
+              <a:buNone/>
+            </a:pPr>
+            <a:r>
+              <a:rPr sz="2200">
+                <a:solidFill>
+                  <a:srgbClr val="1A73E8"/>
+                </a:solidFill>
+                <a:latin typeface="Google Sans Flex SemiBold"/>
+                <a:ea typeface="Google Sans Flex SemiBold"/>
+                <a:cs typeface="Google Sans Flex SemiBold"/>
+                <a:sym typeface="Google Sans Flex SemiBold"/>
+              </a:rPr>
+              <a:t>≈ $0.00005</a:t>
+            </a:r>
+          </a:p>
+        </p:txBody>
+      </p:sp>
+      <p:sp>
+        <p:nvSpPr>
+          <p:cNvPr id="133" name="TextBox 132"/>
+          <p:cNvSpPr txBox="1"/>
+          <p:nvPr/>
+        </p:nvSpPr>
+        <p:spPr>
+          <a:xfrm>
+            <a:off x="5532120" y="1847088"/>
+            <a:ext cx="3200400" cy="475488"/>
+          </a:xfrm>
+          <a:prstGeom prst="rect">
+            <a:avLst/>
+          </a:prstGeom>
+          <a:noFill/>
+        </p:spPr>
+        <p:txBody>
+          <a:bodyPr wrap="square" lIns="36576" rIns="36576" tIns="27432" bIns="27432" anchor="t">
+            <a:spAutoFit/>
+          </a:bodyPr>
+          <a:lstStyle/>
+          <a:p>
+            <a:pPr algn="l">
+              <a:spcAft>
+                <a:spcPts val="0"/>
+              </a:spcAft>
+              <a:buNone/>
+            </a:pPr>
+            <a:r>
+              <a:rPr sz="1200">
+                <a:solidFill>
+                  <a:srgbClr val="202124"/>
+                </a:solidFill>
+                <a:latin typeface="Google Sans Flex"/>
+                <a:ea typeface="Google Sans Flex"/>
+                <a:cs typeface="Google Sans Flex"/>
+                <a:sym typeface="Google Sans Flex"/>
+              </a:rPr>
+              <a:t>per 5-signal call on Jev (~1,100 input tokens)</a:t>
+            </a:r>
+          </a:p>
+        </p:txBody>
+      </p:sp>
+      <p:sp>
+        <p:nvSpPr>
+          <p:cNvPr id="134" name="Rounded Rectangle 133"/>
+          <p:cNvSpPr/>
+          <p:nvPr/>
+        </p:nvSpPr>
+        <p:spPr>
+          <a:xfrm>
+            <a:off x="5394960" y="2450591"/>
+            <a:ext cx="3474720" cy="1078992"/>
+          </a:xfrm>
+          <a:prstGeom prst="roundRect">
+            <a:avLst>
+              <a:gd name="adj" fmla="val 6000"/>
+            </a:avLst>
+          </a:prstGeom>
+          <a:solidFill>
+            <a:srgbClr val="E6F4EA"/>
+          </a:solidFill>
+          <a:ln>
+            <a:noFill/>
+          </a:ln>
+          <a:effectLst/>
+        </p:spPr>
+        <p:style>
+          <a:lnRef idx="1">
+            <a:schemeClr val="accent1"/>
+          </a:lnRef>
+          <a:fillRef idx="3">
+            <a:schemeClr val="accent1"/>
+          </a:fillRef>
+          <a:effectRef idx="2">
+            <a:schemeClr val="accent1"/>
+          </a:effectRef>
+          <a:fontRef idx="minor">
+            <a:schemeClr val="lt1"/>
+          </a:fontRef>
+        </p:style>
+        <p:txBody>
+          <a:bodyPr rtlCol="0" anchor="ctr"/>
+          <a:lstStyle/>
+          <a:p>
+            <a:pPr algn="ctr"/>
+          </a:p>
+        </p:txBody>
+      </p:sp>
+      <p:sp>
+        <p:nvSpPr>
+          <p:cNvPr id="135" name="TextBox 134"/>
+          <p:cNvSpPr txBox="1"/>
+          <p:nvPr/>
+        </p:nvSpPr>
+        <p:spPr>
+          <a:xfrm>
+            <a:off x="5532120" y="2523744"/>
+            <a:ext cx="3200400" cy="457200"/>
+          </a:xfrm>
+          <a:prstGeom prst="rect">
+            <a:avLst/>
+          </a:prstGeom>
+          <a:noFill/>
+        </p:spPr>
+        <p:txBody>
+          <a:bodyPr wrap="square" lIns="36576" rIns="36576" tIns="27432" bIns="27432" anchor="ctr">
+            <a:spAutoFit/>
+          </a:bodyPr>
+          <a:lstStyle/>
+          <a:p>
+            <a:pPr algn="l">
+              <a:spcAft>
+                <a:spcPts val="0"/>
+              </a:spcAft>
+              <a:buNone/>
+            </a:pPr>
+            <a:r>
+              <a:rPr sz="2200">
+                <a:solidFill>
+                  <a:srgbClr val="188038"/>
+                </a:solidFill>
+                <a:latin typeface="Google Sans Flex SemiBold"/>
+                <a:ea typeface="Google Sans Flex SemiBold"/>
+                <a:cs typeface="Google Sans Flex SemiBold"/>
+                <a:sym typeface="Google Sans Flex SemiBold"/>
+              </a:rPr>
+              <a:t>≈ $0.02</a:t>
+            </a:r>
+          </a:p>
+        </p:txBody>
+      </p:sp>
+      <p:sp>
+        <p:nvSpPr>
+          <p:cNvPr id="136" name="TextBox 135"/>
+          <p:cNvSpPr txBox="1"/>
+          <p:nvPr/>
+        </p:nvSpPr>
+        <p:spPr>
+          <a:xfrm>
+            <a:off x="5532120" y="3017520"/>
+            <a:ext cx="3200400" cy="475488"/>
+          </a:xfrm>
+          <a:prstGeom prst="rect">
+            <a:avLst/>
+          </a:prstGeom>
+          <a:noFill/>
+        </p:spPr>
+        <p:txBody>
+          <a:bodyPr wrap="square" lIns="36576" rIns="36576" tIns="27432" bIns="27432" anchor="t">
+            <a:spAutoFit/>
+          </a:bodyPr>
+          <a:lstStyle/>
+          <a:p>
+            <a:pPr algn="l">
+              <a:spcAft>
+                <a:spcPts val="0"/>
+              </a:spcAft>
+              <a:buNone/>
+            </a:pPr>
+            <a:r>
+              <a:rPr sz="1200">
+                <a:solidFill>
+                  <a:srgbClr val="202124"/>
+                </a:solidFill>
+                <a:latin typeface="Google Sans Flex"/>
+                <a:ea typeface="Google Sans Flex"/>
+                <a:cs typeface="Google Sans Flex"/>
+                <a:sym typeface="Google Sans Flex"/>
+              </a:rPr>
+              <a:t>to transcribe a 10-minute recording on Gemini 3.8 Flash</a:t>
+            </a:r>
+          </a:p>
+        </p:txBody>
+      </p:sp>
+      <p:sp>
+        <p:nvSpPr>
+          <p:cNvPr id="137" name="Rounded Rectangle 136"/>
+          <p:cNvSpPr/>
+          <p:nvPr/>
+        </p:nvSpPr>
+        <p:spPr>
+          <a:xfrm>
+            <a:off x="5394960" y="3621024"/>
+            <a:ext cx="3474720" cy="1078992"/>
+          </a:xfrm>
+          <a:prstGeom prst="roundRect">
+            <a:avLst>
+              <a:gd name="adj" fmla="val 6000"/>
+            </a:avLst>
+          </a:prstGeom>
+          <a:solidFill>
+            <a:srgbClr val="FEF7E0"/>
+          </a:solidFill>
+          <a:ln>
+            <a:noFill/>
+          </a:ln>
+          <a:effectLst/>
+        </p:spPr>
+        <p:style>
+          <a:lnRef idx="1">
+            <a:schemeClr val="accent1"/>
+          </a:lnRef>
+          <a:fillRef idx="3">
+            <a:schemeClr val="accent1"/>
+          </a:fillRef>
+          <a:effectRef idx="2">
+            <a:schemeClr val="accent1"/>
+          </a:effectRef>
+          <a:fontRef idx="minor">
+            <a:schemeClr val="lt1"/>
+          </a:fontRef>
+        </p:style>
+        <p:txBody>
+          <a:bodyPr rtlCol="0" anchor="ctr"/>
+          <a:lstStyle/>
+          <a:p>
+            <a:pPr algn="ctr"/>
+          </a:p>
+        </p:txBody>
+      </p:sp>
+      <p:sp>
+        <p:nvSpPr>
+          <p:cNvPr id="138" name="TextBox 137"/>
+          <p:cNvSpPr txBox="1"/>
+          <p:nvPr/>
+        </p:nvSpPr>
+        <p:spPr>
+          <a:xfrm>
+            <a:off x="5532120" y="3694176"/>
+            <a:ext cx="3200400" cy="457200"/>
+          </a:xfrm>
+          <a:prstGeom prst="rect">
+            <a:avLst/>
+          </a:prstGeom>
+          <a:noFill/>
+        </p:spPr>
+        <p:txBody>
+          <a:bodyPr wrap="square" lIns="36576" rIns="36576" tIns="27432" bIns="27432" anchor="ctr">
+            <a:spAutoFit/>
+          </a:bodyPr>
+          <a:lstStyle/>
+          <a:p>
+            <a:pPr algn="l">
+              <a:spcAft>
+                <a:spcPts val="0"/>
+              </a:spcAft>
+              <a:buNone/>
+            </a:pPr>
+            <a:r>
+              <a:rPr sz="2200">
+                <a:solidFill>
+                  <a:srgbClr val="B06000"/>
+                </a:solidFill>
+                <a:latin typeface="Google Sans Flex SemiBold"/>
+                <a:ea typeface="Google Sans Flex SemiBold"/>
+                <a:cs typeface="Google Sans Flex SemiBold"/>
+                <a:sym typeface="Google Sans Flex SemiBold"/>
+              </a:rPr>
+              <a:t>≈ $0</a:t>
+            </a:r>
+          </a:p>
+        </p:txBody>
+      </p:sp>
+      <p:sp>
+        <p:nvSpPr>
+          <p:cNvPr id="139" name="TextBox 138"/>
+          <p:cNvSpPr txBox="1"/>
+          <p:nvPr/>
+        </p:nvSpPr>
+        <p:spPr>
+          <a:xfrm>
+            <a:off x="5532120" y="4187952"/>
+            <a:ext cx="3200400" cy="475488"/>
+          </a:xfrm>
+          <a:prstGeom prst="rect">
+            <a:avLst/>
+          </a:prstGeom>
+          <a:noFill/>
+        </p:spPr>
+        <p:txBody>
+          <a:bodyPr wrap="square" lIns="36576" rIns="36576" tIns="27432" bIns="27432" anchor="t">
+            <a:spAutoFit/>
+          </a:bodyPr>
+          <a:lstStyle/>
+          <a:p>
+            <a:pPr algn="l">
+              <a:spcAft>
+                <a:spcPts val="0"/>
+              </a:spcAft>
+              <a:buNone/>
+            </a:pPr>
+            <a:r>
+              <a:rPr sz="1200">
+                <a:solidFill>
+                  <a:srgbClr val="202124"/>
+                </a:solidFill>
+                <a:latin typeface="Google Sans Flex"/>
+                <a:ea typeface="Google Sans Flex"/>
+                <a:cs typeface="Google Sans Flex"/>
+                <a:sym typeface="Google Sans Flex"/>
+              </a:rPr>
+              <a:t>Google Cloud infra at demo scale (free tiers)</a:t>
             </a:r>
           </a:p>
         </p:txBody>
